--- a/template-master.pptx
+++ b/template-master.pptx
@@ -255,7 +255,7 @@
           <a:p>
             <a:fld id="{0B842F42-2CE9-4E35-95C1-410DC08A50B1}" type="datetimeFigureOut">
               <a:rPr lang="en-US" smtClean="0"/>
-              <a:t>4/28/2024</a:t>
+              <a:t>8/5/2025</a:t>
             </a:fld>
             <a:endParaRPr lang="en-US"/>
           </a:p>
@@ -420,7 +420,7 @@
           <a:p>
             <a:fld id="{6F282904-F315-4730-8D91-37D99E141A6F}" type="datetimeFigureOut">
               <a:rPr lang="en-US" smtClean="0"/>
-              <a:t>4/28/2024</a:t>
+              <a:t>8/5/2025</a:t>
             </a:fld>
             <a:endParaRPr lang="en-US"/>
           </a:p>
@@ -1254,127 +1254,12 @@
           </a:prstGeom>
         </p:spPr>
       </p:pic>
-      <p:grpSp>
-        <p:nvGrpSpPr>
-          <p:cNvPr id="5" name="Group 4">
+      <p:pic>
+        <p:nvPicPr>
+          <p:cNvPr id="31" name="Picture 30">
             <a:extLst>
               <a:ext uri="{FF2B5EF4-FFF2-40B4-BE49-F238E27FC236}">
-                <a16:creationId xmlns:a16="http://schemas.microsoft.com/office/drawing/2014/main" id="{2211A969-E7EA-13C3-D014-C029084F4EFB}"/>
-              </a:ext>
-            </a:extLst>
-          </p:cNvPr>
-          <p:cNvGrpSpPr/>
-          <p:nvPr userDrawn="1"/>
-        </p:nvGrpSpPr>
-        <p:grpSpPr>
-          <a:xfrm>
-            <a:off x="366259" y="3655396"/>
-            <a:ext cx="2214716" cy="356329"/>
-            <a:chOff x="341278" y="3628835"/>
-            <a:chExt cx="2214716" cy="356329"/>
-          </a:xfrm>
-        </p:grpSpPr>
-        <p:pic>
-          <p:nvPicPr>
-            <p:cNvPr id="7" name="Picture 2">
-              <a:extLst>
-                <a:ext uri="{FF2B5EF4-FFF2-40B4-BE49-F238E27FC236}">
-                  <a16:creationId xmlns:a16="http://schemas.microsoft.com/office/drawing/2014/main" id="{D16A6A85-AECD-6121-D004-ECB79BC13076}"/>
-                </a:ext>
-              </a:extLst>
-            </p:cNvPr>
-            <p:cNvPicPr>
-              <a:picLocks noChangeAspect="1" noChangeArrowheads="1"/>
-            </p:cNvPicPr>
-            <p:nvPr userDrawn="1"/>
-          </p:nvPicPr>
-          <p:blipFill>
-            <a:blip r:embed="rId4">
-              <a:extLst>
-                <a:ext uri="{28A0092B-C50C-407E-A947-70E740481C1C}">
-                  <a14:useLocalDpi xmlns:a14="http://schemas.microsoft.com/office/drawing/2010/main" val="0"/>
-                </a:ext>
-              </a:extLst>
-            </a:blip>
-            <a:srcRect/>
-            <a:stretch>
-              <a:fillRect/>
-            </a:stretch>
-          </p:blipFill>
-          <p:spPr bwMode="auto">
-            <a:xfrm>
-              <a:off x="341278" y="3628835"/>
-              <a:ext cx="1005840" cy="356329"/>
-            </a:xfrm>
-            <a:prstGeom prst="rect">
-              <a:avLst/>
-            </a:prstGeom>
-            <a:noFill/>
-            <a:extLst>
-              <a:ext uri="{909E8E84-426E-40DD-AFC4-6F175D3DCCD1}">
-                <a14:hiddenFill xmlns:a14="http://schemas.microsoft.com/office/drawing/2010/main">
-                  <a:solidFill>
-                    <a:srgbClr val="FFFFFF"/>
-                  </a:solidFill>
-                </a14:hiddenFill>
-              </a:ext>
-            </a:extLst>
-          </p:spPr>
-        </p:pic>
-        <p:pic>
-          <p:nvPicPr>
-            <p:cNvPr id="10" name="Picture 4">
-              <a:extLst>
-                <a:ext uri="{FF2B5EF4-FFF2-40B4-BE49-F238E27FC236}">
-                  <a16:creationId xmlns:a16="http://schemas.microsoft.com/office/drawing/2014/main" id="{87D2793C-01C6-B180-3495-5A2067445539}"/>
-                </a:ext>
-              </a:extLst>
-            </p:cNvPr>
-            <p:cNvPicPr>
-              <a:picLocks noChangeAspect="1" noChangeArrowheads="1"/>
-            </p:cNvPicPr>
-            <p:nvPr userDrawn="1"/>
-          </p:nvPicPr>
-          <p:blipFill>
-            <a:blip r:embed="rId5" cstate="print">
-              <a:extLst>
-                <a:ext uri="{28A0092B-C50C-407E-A947-70E740481C1C}">
-                  <a14:useLocalDpi xmlns:a14="http://schemas.microsoft.com/office/drawing/2010/main" val="0"/>
-                </a:ext>
-              </a:extLst>
-            </a:blip>
-            <a:srcRect/>
-            <a:stretch>
-              <a:fillRect/>
-            </a:stretch>
-          </p:blipFill>
-          <p:spPr bwMode="auto">
-            <a:xfrm>
-              <a:off x="1550154" y="3690079"/>
-              <a:ext cx="1005840" cy="233840"/>
-            </a:xfrm>
-            <a:prstGeom prst="rect">
-              <a:avLst/>
-            </a:prstGeom>
-            <a:noFill/>
-            <a:extLst>
-              <a:ext uri="{909E8E84-426E-40DD-AFC4-6F175D3DCCD1}">
-                <a14:hiddenFill xmlns:a14="http://schemas.microsoft.com/office/drawing/2010/main">
-                  <a:solidFill>
-                    <a:srgbClr val="FFFFFF"/>
-                  </a:solidFill>
-                </a14:hiddenFill>
-              </a:ext>
-            </a:extLst>
-          </p:spPr>
-        </p:pic>
-      </p:grpSp>
-      <p:pic>
-        <p:nvPicPr>
-          <p:cNvPr id="18" name="Picture 17" descr="A black and white sign with blue text&#10;&#10;Description automatically generated">
-            <a:extLst>
-              <a:ext uri="{FF2B5EF4-FFF2-40B4-BE49-F238E27FC236}">
-                <a16:creationId xmlns:a16="http://schemas.microsoft.com/office/drawing/2014/main" id="{90ECFB80-075A-EDC0-363D-3CE459F436D1}"/>
+                <a16:creationId xmlns:a16="http://schemas.microsoft.com/office/drawing/2014/main" id="{F6BAEEDA-B6C4-7DDA-6A83-26F20E08F28B}"/>
               </a:ext>
             </a:extLst>
           </p:cNvPr>
@@ -1384,8 +1269,17 @@
           <p:nvPr userDrawn="1"/>
         </p:nvPicPr>
         <p:blipFill>
-          <a:blip r:embed="rId6" cstate="print">
+          <a:blip r:embed="rId4" cstate="print">
             <a:extLst>
+              <a:ext uri="{BEBA8EAE-BF5A-486C-A8C5-ECC9F3942E4B}">
+                <a14:imgProps xmlns:a14="http://schemas.microsoft.com/office/drawing/2010/main">
+                  <a14:imgLayer r:embed="rId5">
+                    <a14:imgEffect>
+                      <a14:brightnessContrast bright="100000"/>
+                    </a14:imgEffect>
+                  </a14:imgLayer>
+                </a14:imgProps>
+              </a:ext>
               <a:ext uri="{28A0092B-C50C-407E-A947-70E740481C1C}">
                 <a14:useLocalDpi xmlns:a14="http://schemas.microsoft.com/office/drawing/2010/main" val="0"/>
               </a:ext>
@@ -1397,8 +1291,8 @@
         </p:blipFill>
         <p:spPr>
           <a:xfrm>
-            <a:off x="970697" y="4125123"/>
-            <a:ext cx="1005840" cy="324328"/>
+            <a:off x="9536165" y="6321694"/>
+            <a:ext cx="2409477" cy="401008"/>
           </a:xfrm>
           <a:prstGeom prst="rect">
             <a:avLst/>
@@ -1407,10 +1301,10 @@
       </p:pic>
       <p:sp>
         <p:nvSpPr>
-          <p:cNvPr id="19" name="TextBox 18">
+          <p:cNvPr id="34" name="TextBox 33">
             <a:extLst>
               <a:ext uri="{FF2B5EF4-FFF2-40B4-BE49-F238E27FC236}">
-                <a16:creationId xmlns:a16="http://schemas.microsoft.com/office/drawing/2014/main" id="{23984D22-2BE9-C684-93D1-920B201DC418}"/>
+                <a16:creationId xmlns:a16="http://schemas.microsoft.com/office/drawing/2014/main" id="{8C9E3B41-F49D-0B50-0F40-049E89C7816F}"/>
               </a:ext>
             </a:extLst>
           </p:cNvPr>
@@ -1419,7 +1313,7 @@
         </p:nvSpPr>
         <p:spPr>
           <a:xfrm>
-            <a:off x="901538" y="1776974"/>
+            <a:off x="901538" y="1454246"/>
             <a:ext cx="1144159" cy="350865"/>
           </a:xfrm>
           <a:prstGeom prst="rect">
@@ -1447,10 +1341,10 @@
       </p:sp>
       <p:sp>
         <p:nvSpPr>
-          <p:cNvPr id="24" name="TextBox 23">
+          <p:cNvPr id="35" name="TextBox 34">
             <a:extLst>
               <a:ext uri="{FF2B5EF4-FFF2-40B4-BE49-F238E27FC236}">
-                <a16:creationId xmlns:a16="http://schemas.microsoft.com/office/drawing/2014/main" id="{9EA65A86-1694-D0BE-3C46-045E2B00D094}"/>
+                <a16:creationId xmlns:a16="http://schemas.microsoft.com/office/drawing/2014/main" id="{C1BE5FD8-AF8B-A079-41D0-0E7F2D2440A7}"/>
               </a:ext>
             </a:extLst>
           </p:cNvPr>
@@ -1459,48 +1353,8 @@
         </p:nvSpPr>
         <p:spPr>
           <a:xfrm>
-            <a:off x="28657" y="2079048"/>
-            <a:ext cx="2889921" cy="932563"/>
-          </a:xfrm>
-          <a:prstGeom prst="rect">
-            <a:avLst/>
-          </a:prstGeom>
-          <a:noFill/>
-        </p:spPr>
-        <p:txBody>
-          <a:bodyPr wrap="square" lIns="118872" tIns="91440" rIns="118872" bIns="91440" rtlCol="0" anchor="ctr" anchorCtr="0">
-            <a:spAutoFit/>
-          </a:bodyPr>
-          <a:lstStyle/>
-          <a:p>
-            <a:pPr algn="l">
-              <a:lnSpc>
-                <a:spcPct val="90000"/>
-              </a:lnSpc>
-            </a:pPr>
-            <a:r>
-              <a:rPr lang="en-US" b="1" dirty="0"/>
-              <a:t>COLABS: Collaboration for Better Software for Science</a:t>
-            </a:r>
-          </a:p>
-        </p:txBody>
-      </p:sp>
-      <p:sp>
-        <p:nvSpPr>
-          <p:cNvPr id="25" name="TextBox 24">
-            <a:extLst>
-              <a:ext uri="{FF2B5EF4-FFF2-40B4-BE49-F238E27FC236}">
-                <a16:creationId xmlns:a16="http://schemas.microsoft.com/office/drawing/2014/main" id="{7C98D32A-D229-5172-E298-9AF976ACE627}"/>
-              </a:ext>
-            </a:extLst>
-          </p:cNvPr>
-          <p:cNvSpPr txBox="1"/>
-          <p:nvPr userDrawn="1"/>
-        </p:nvSpPr>
-        <p:spPr>
-          <a:xfrm>
-            <a:off x="676315" y="3191133"/>
-            <a:ext cx="1594604" cy="350865"/>
+            <a:off x="948025" y="2646131"/>
+            <a:ext cx="1051185" cy="350865"/>
           </a:xfrm>
           <a:prstGeom prst="rect">
             <a:avLst/>
@@ -1520,17 +1374,17 @@
             </a:pPr>
             <a:r>
               <a:rPr lang="en-US" sz="1200" i="1" dirty="0"/>
-              <a:t>In collaboration with</a:t>
+              <a:t>Members of</a:t>
             </a:r>
           </a:p>
         </p:txBody>
       </p:sp>
       <p:sp>
         <p:nvSpPr>
-          <p:cNvPr id="26" name="TextBox 25">
+          <p:cNvPr id="36" name="TextBox 35">
             <a:extLst>
               <a:ext uri="{FF2B5EF4-FFF2-40B4-BE49-F238E27FC236}">
-                <a16:creationId xmlns:a16="http://schemas.microsoft.com/office/drawing/2014/main" id="{64D46951-9F99-A303-D249-27B751A562DB}"/>
+                <a16:creationId xmlns:a16="http://schemas.microsoft.com/office/drawing/2014/main" id="{F223C4DF-C336-C45B-171E-1ADC0F6E526D}"/>
               </a:ext>
             </a:extLst>
           </p:cNvPr>
@@ -1539,7 +1393,7 @@
         </p:nvSpPr>
         <p:spPr>
           <a:xfrm>
-            <a:off x="572120" y="4562849"/>
+            <a:off x="572120" y="4624321"/>
             <a:ext cx="1802994" cy="350865"/>
           </a:xfrm>
           <a:prstGeom prst="rect">
@@ -1567,10 +1421,10 @@
       </p:sp>
       <p:grpSp>
         <p:nvGrpSpPr>
-          <p:cNvPr id="27" name="Group 26">
+          <p:cNvPr id="37" name="Group 36">
             <a:extLst>
               <a:ext uri="{FF2B5EF4-FFF2-40B4-BE49-F238E27FC236}">
-                <a16:creationId xmlns:a16="http://schemas.microsoft.com/office/drawing/2014/main" id="{CC665AB1-818C-15F6-A435-7A7C14109262}"/>
+                <a16:creationId xmlns:a16="http://schemas.microsoft.com/office/drawing/2014/main" id="{A8D795ED-69F4-3AB8-A669-D6134F32DB92}"/>
               </a:ext>
             </a:extLst>
           </p:cNvPr>
@@ -1587,10 +1441,10 @@
         </p:grpSpPr>
         <p:pic>
           <p:nvPicPr>
-            <p:cNvPr id="28" name="Picture 27">
+            <p:cNvPr id="38" name="Picture 37">
               <a:extLst>
                 <a:ext uri="{FF2B5EF4-FFF2-40B4-BE49-F238E27FC236}">
-                  <a16:creationId xmlns:a16="http://schemas.microsoft.com/office/drawing/2014/main" id="{D8D4DA06-93FC-7C79-22C0-69CD6E71946F}"/>
+                  <a16:creationId xmlns:a16="http://schemas.microsoft.com/office/drawing/2014/main" id="{669E8867-BEF2-E3D0-51F3-86959AAF8F00}"/>
                 </a:ext>
               </a:extLst>
             </p:cNvPr>
@@ -1600,7 +1454,7 @@
             <p:nvPr userDrawn="1"/>
           </p:nvPicPr>
           <p:blipFill>
-            <a:blip r:embed="rId7" cstate="print">
+            <a:blip r:embed="rId6" cstate="print">
               <a:extLst>
                 <a:ext uri="{28A0092B-C50C-407E-A947-70E740481C1C}">
                   <a14:useLocalDpi xmlns:a14="http://schemas.microsoft.com/office/drawing/2010/main" val="0"/>
@@ -1623,10 +1477,10 @@
         </p:pic>
         <p:pic>
           <p:nvPicPr>
-            <p:cNvPr id="29" name="Picture 28" descr="A picture containing shape&#10;&#10;Description automatically generated">
+            <p:cNvPr id="39" name="Picture 38" descr="A picture containing shape&#10;&#10;Description automatically generated">
               <a:extLst>
                 <a:ext uri="{FF2B5EF4-FFF2-40B4-BE49-F238E27FC236}">
-                  <a16:creationId xmlns:a16="http://schemas.microsoft.com/office/drawing/2014/main" id="{3A576A20-C17C-D6D5-507F-A7C5D2EE03B7}"/>
+                  <a16:creationId xmlns:a16="http://schemas.microsoft.com/office/drawing/2014/main" id="{707DB31D-C094-FB63-B25D-3281FAD4535A}"/>
                 </a:ext>
               </a:extLst>
             </p:cNvPr>
@@ -1636,7 +1490,7 @@
             <p:nvPr userDrawn="1"/>
           </p:nvPicPr>
           <p:blipFill>
-            <a:blip r:embed="rId8">
+            <a:blip r:embed="rId7">
               <a:extLst>
                 <a:ext uri="{28A0092B-C50C-407E-A947-70E740481C1C}">
                   <a14:useLocalDpi xmlns:a14="http://schemas.microsoft.com/office/drawing/2010/main" val="0"/>
@@ -1658,12 +1512,263 @@
           </p:spPr>
         </p:pic>
       </p:grpSp>
+      <p:grpSp>
+        <p:nvGrpSpPr>
+          <p:cNvPr id="40" name="Group 39">
+            <a:extLst>
+              <a:ext uri="{FF2B5EF4-FFF2-40B4-BE49-F238E27FC236}">
+                <a16:creationId xmlns:a16="http://schemas.microsoft.com/office/drawing/2014/main" id="{4039412D-999C-F978-5DA7-413091B42F14}"/>
+              </a:ext>
+            </a:extLst>
+          </p:cNvPr>
+          <p:cNvGrpSpPr/>
+          <p:nvPr userDrawn="1"/>
+        </p:nvGrpSpPr>
+        <p:grpSpPr>
+          <a:xfrm>
+            <a:off x="-69503" y="1892144"/>
+            <a:ext cx="2985270" cy="790169"/>
+            <a:chOff x="-69503" y="2214872"/>
+            <a:chExt cx="2985270" cy="790169"/>
+          </a:xfrm>
+        </p:grpSpPr>
+        <p:pic>
+          <p:nvPicPr>
+            <p:cNvPr id="41" name="Picture 4">
+              <a:extLst>
+                <a:ext uri="{FF2B5EF4-FFF2-40B4-BE49-F238E27FC236}">
+                  <a16:creationId xmlns:a16="http://schemas.microsoft.com/office/drawing/2014/main" id="{30A3D0A4-DC0E-58F3-9A48-51515E60B9F0}"/>
+                </a:ext>
+              </a:extLst>
+            </p:cNvPr>
+            <p:cNvPicPr>
+              <a:picLocks noChangeAspect="1" noChangeArrowheads="1"/>
+            </p:cNvPicPr>
+            <p:nvPr userDrawn="1"/>
+          </p:nvPicPr>
+          <p:blipFill>
+            <a:blip r:embed="rId8" cstate="print">
+              <a:extLst>
+                <a:ext uri="{28A0092B-C50C-407E-A947-70E740481C1C}">
+                  <a14:useLocalDpi xmlns:a14="http://schemas.microsoft.com/office/drawing/2010/main" val="0"/>
+                </a:ext>
+              </a:extLst>
+            </a:blip>
+            <a:srcRect/>
+            <a:stretch>
+              <a:fillRect/>
+            </a:stretch>
+          </p:blipFill>
+          <p:spPr bwMode="auto">
+            <a:xfrm>
+              <a:off x="1484438" y="2317122"/>
+              <a:ext cx="1371600" cy="318873"/>
+            </a:xfrm>
+            <a:prstGeom prst="rect">
+              <a:avLst/>
+            </a:prstGeom>
+            <a:noFill/>
+            <a:extLst>
+              <a:ext uri="{909E8E84-426E-40DD-AFC4-6F175D3DCCD1}">
+                <a14:hiddenFill xmlns:a14="http://schemas.microsoft.com/office/drawing/2010/main">
+                  <a:solidFill>
+                    <a:srgbClr val="FFFFFF"/>
+                  </a:solidFill>
+                </a14:hiddenFill>
+              </a:ext>
+            </a:extLst>
+          </p:spPr>
+        </p:pic>
+        <p:pic>
+          <p:nvPicPr>
+            <p:cNvPr id="42" name="Picture 2" descr="A picture containing graphics, logo, font, symbol&#10;&#10;Description automatically generated">
+              <a:extLst>
+                <a:ext uri="{FF2B5EF4-FFF2-40B4-BE49-F238E27FC236}">
+                  <a16:creationId xmlns:a16="http://schemas.microsoft.com/office/drawing/2014/main" id="{44BDD6D9-E875-9A48-229D-0FC4FF98EFB2}"/>
+                </a:ext>
+              </a:extLst>
+            </p:cNvPr>
+            <p:cNvPicPr>
+              <a:picLocks noChangeAspect="1" noChangeArrowheads="1"/>
+            </p:cNvPicPr>
+            <p:nvPr userDrawn="1"/>
+          </p:nvPicPr>
+          <p:blipFill>
+            <a:blip r:embed="rId9" cstate="print">
+              <a:extLst>
+                <a:ext uri="{28A0092B-C50C-407E-A947-70E740481C1C}">
+                  <a14:useLocalDpi xmlns:a14="http://schemas.microsoft.com/office/drawing/2010/main" val="0"/>
+                </a:ext>
+              </a:extLst>
+            </a:blip>
+            <a:srcRect/>
+            <a:stretch>
+              <a:fillRect/>
+            </a:stretch>
+          </p:blipFill>
+          <p:spPr bwMode="auto">
+            <a:xfrm>
+              <a:off x="321595" y="2214872"/>
+              <a:ext cx="841248" cy="523372"/>
+            </a:xfrm>
+            <a:prstGeom prst="rect">
+              <a:avLst/>
+            </a:prstGeom>
+            <a:noFill/>
+            <a:extLst>
+              <a:ext uri="{909E8E84-426E-40DD-AFC4-6F175D3DCCD1}">
+                <a14:hiddenFill xmlns:a14="http://schemas.microsoft.com/office/drawing/2010/main">
+                  <a:solidFill>
+                    <a:srgbClr val="FFFFFF"/>
+                  </a:solidFill>
+                </a14:hiddenFill>
+              </a:ext>
+            </a:extLst>
+          </p:spPr>
+        </p:pic>
+        <p:sp>
+          <p:nvSpPr>
+            <p:cNvPr id="43" name="TextBox 42">
+              <a:extLst>
+                <a:ext uri="{FF2B5EF4-FFF2-40B4-BE49-F238E27FC236}">
+                  <a16:creationId xmlns:a16="http://schemas.microsoft.com/office/drawing/2014/main" id="{5CCFCAF6-928D-C709-56D6-214EA337FF36}"/>
+                </a:ext>
+              </a:extLst>
+            </p:cNvPr>
+            <p:cNvSpPr txBox="1"/>
+            <p:nvPr userDrawn="1"/>
+          </p:nvSpPr>
+          <p:spPr>
+            <a:xfrm>
+              <a:off x="-69503" y="2668026"/>
+              <a:ext cx="1631472" cy="337015"/>
+            </a:xfrm>
+            <a:prstGeom prst="rect">
+              <a:avLst/>
+            </a:prstGeom>
+            <a:noFill/>
+          </p:spPr>
+          <p:txBody>
+            <a:bodyPr wrap="none" lIns="118872" tIns="91440" rIns="118872" bIns="91440" rtlCol="0" anchor="ctr" anchorCtr="0">
+              <a:spAutoFit/>
+            </a:bodyPr>
+            <a:lstStyle/>
+            <a:p>
+              <a:pPr algn="l">
+                <a:lnSpc>
+                  <a:spcPct val="90000"/>
+                </a:lnSpc>
+              </a:pPr>
+              <a:r>
+                <a:rPr lang="en-US" sz="1050" i="1" dirty="0">
+                  <a:hlinkClick r:id="rId10"/>
+                </a:rPr>
+                <a:t>https://pesoproject.org</a:t>
+              </a:r>
+              <a:endParaRPr lang="en-US" sz="1050" i="1" dirty="0"/>
+            </a:p>
+          </p:txBody>
+        </p:sp>
+        <p:sp>
+          <p:nvSpPr>
+            <p:cNvPr id="44" name="TextBox 43">
+              <a:extLst>
+                <a:ext uri="{FF2B5EF4-FFF2-40B4-BE49-F238E27FC236}">
+                  <a16:creationId xmlns:a16="http://schemas.microsoft.com/office/drawing/2014/main" id="{4D579EA8-3D71-5A46-84DB-95A19F99F549}"/>
+                </a:ext>
+              </a:extLst>
+            </p:cNvPr>
+            <p:cNvSpPr txBox="1"/>
+            <p:nvPr userDrawn="1"/>
+          </p:nvSpPr>
+          <p:spPr>
+            <a:xfrm>
+              <a:off x="1423755" y="2668026"/>
+              <a:ext cx="1492012" cy="337015"/>
+            </a:xfrm>
+            <a:prstGeom prst="rect">
+              <a:avLst/>
+            </a:prstGeom>
+            <a:noFill/>
+          </p:spPr>
+          <p:txBody>
+            <a:bodyPr wrap="none" lIns="118872" tIns="91440" rIns="118872" bIns="91440" rtlCol="0" anchor="ctr" anchorCtr="0">
+              <a:spAutoFit/>
+            </a:bodyPr>
+            <a:lstStyle/>
+            <a:p>
+              <a:pPr algn="l">
+                <a:lnSpc>
+                  <a:spcPct val="90000"/>
+                </a:lnSpc>
+              </a:pPr>
+              <a:r>
+                <a:rPr lang="en-US" sz="1050" i="1" dirty="0">
+                  <a:hlinkClick r:id="rId11"/>
+                </a:rPr>
+                <a:t>https://rapids.lbl.gov</a:t>
+              </a:r>
+              <a:endParaRPr lang="en-US" sz="1050" i="1" dirty="0"/>
+            </a:p>
+          </p:txBody>
+        </p:sp>
+      </p:grpSp>
+      <p:sp>
+        <p:nvSpPr>
+          <p:cNvPr id="45" name="TextBox 44">
+            <a:extLst>
+              <a:ext uri="{FF2B5EF4-FFF2-40B4-BE49-F238E27FC236}">
+                <a16:creationId xmlns:a16="http://schemas.microsoft.com/office/drawing/2014/main" id="{F6E3FB4E-4104-6184-D305-6EEC3554DA70}"/>
+              </a:ext>
+            </a:extLst>
+          </p:cNvPr>
+          <p:cNvSpPr txBox="1"/>
+          <p:nvPr userDrawn="1"/>
+        </p:nvSpPr>
+        <p:spPr>
+          <a:xfrm>
+            <a:off x="166031" y="4011401"/>
+            <a:ext cx="2605511" cy="655564"/>
+          </a:xfrm>
+          <a:prstGeom prst="rect">
+            <a:avLst/>
+          </a:prstGeom>
+          <a:noFill/>
+        </p:spPr>
+        <p:txBody>
+          <a:bodyPr wrap="square" lIns="118872" tIns="91440" rIns="118872" bIns="91440" rtlCol="0" anchor="ctr" anchorCtr="0">
+            <a:spAutoFit/>
+          </a:bodyPr>
+          <a:lstStyle/>
+          <a:p>
+            <a:pPr algn="ctr">
+              <a:lnSpc>
+                <a:spcPct val="90000"/>
+              </a:lnSpc>
+            </a:pPr>
+            <a:r>
+              <a:rPr lang="en-US" sz="1200" i="1" dirty="0"/>
+              <a:t>Consortium for the Advancement of Scientific Software</a:t>
+            </a:r>
+            <a:br>
+              <a:rPr lang="en-US" sz="1200" i="1" dirty="0"/>
+            </a:br>
+            <a:r>
+              <a:rPr lang="en-US" sz="1000" i="1" dirty="0">
+                <a:hlinkClick r:id="rId12"/>
+              </a:rPr>
+              <a:t>https://cass.community</a:t>
+            </a:r>
+            <a:endParaRPr lang="en-US" sz="1200" i="1" dirty="0"/>
+          </a:p>
+        </p:txBody>
+      </p:sp>
       <p:pic>
         <p:nvPicPr>
-          <p:cNvPr id="31" name="Picture 30">
+          <p:cNvPr id="46" name="Picture 45" descr="A picture containing arrow&#10;&#10;AI-generated content may be incorrect.">
             <a:extLst>
               <a:ext uri="{FF2B5EF4-FFF2-40B4-BE49-F238E27FC236}">
-                <a16:creationId xmlns:a16="http://schemas.microsoft.com/office/drawing/2014/main" id="{F6BAEEDA-B6C4-7DDA-6A83-26F20E08F28B}"/>
+                <a16:creationId xmlns:a16="http://schemas.microsoft.com/office/drawing/2014/main" id="{3295FA3E-0898-BBB5-5094-1DD714FB567C}"/>
               </a:ext>
             </a:extLst>
           </p:cNvPr>
@@ -1673,17 +1778,8 @@
           <p:nvPr userDrawn="1"/>
         </p:nvPicPr>
         <p:blipFill>
-          <a:blip r:embed="rId9" cstate="print">
+          <a:blip r:embed="rId13" cstate="print">
             <a:extLst>
-              <a:ext uri="{BEBA8EAE-BF5A-486C-A8C5-ECC9F3942E4B}">
-                <a14:imgProps xmlns:a14="http://schemas.microsoft.com/office/drawing/2010/main">
-                  <a14:imgLayer r:embed="rId10">
-                    <a14:imgEffect>
-                      <a14:brightnessContrast bright="100000"/>
-                    </a14:imgEffect>
-                  </a14:imgLayer>
-                </a14:imgProps>
-              </a:ext>
               <a:ext uri="{28A0092B-C50C-407E-A947-70E740481C1C}">
                 <a14:useLocalDpi xmlns:a14="http://schemas.microsoft.com/office/drawing/2010/main" val="0"/>
               </a:ext>
@@ -1695,8 +1791,8 @@
         </p:blipFill>
         <p:spPr>
           <a:xfrm>
-            <a:off x="9536165" y="6321694"/>
-            <a:ext cx="2409477" cy="401008"/>
+            <a:off x="849769" y="2974535"/>
+            <a:ext cx="1238034" cy="1128739"/>
           </a:xfrm>
           <a:prstGeom prst="rect">
             <a:avLst/>
@@ -2194,163 +2290,12 @@
           </a:prstGeom>
         </p:spPr>
       </p:pic>
-      <p:grpSp>
-        <p:nvGrpSpPr>
-          <p:cNvPr id="21" name="Group 20">
+      <p:sp>
+        <p:nvSpPr>
+          <p:cNvPr id="34" name="TextBox 33">
             <a:extLst>
               <a:ext uri="{FF2B5EF4-FFF2-40B4-BE49-F238E27FC236}">
-                <a16:creationId xmlns:a16="http://schemas.microsoft.com/office/drawing/2014/main" id="{23F39736-1AFA-8528-C9E3-41B55EABEDCA}"/>
-              </a:ext>
-            </a:extLst>
-          </p:cNvPr>
-          <p:cNvGrpSpPr/>
-          <p:nvPr userDrawn="1"/>
-        </p:nvGrpSpPr>
-        <p:grpSpPr>
-          <a:xfrm>
-            <a:off x="366259" y="3655396"/>
-            <a:ext cx="2214716" cy="356329"/>
-            <a:chOff x="341278" y="3628835"/>
-            <a:chExt cx="2214716" cy="356329"/>
-          </a:xfrm>
-        </p:grpSpPr>
-        <p:pic>
-          <p:nvPicPr>
-            <p:cNvPr id="6" name="Picture 2">
-              <a:extLst>
-                <a:ext uri="{FF2B5EF4-FFF2-40B4-BE49-F238E27FC236}">
-                  <a16:creationId xmlns:a16="http://schemas.microsoft.com/office/drawing/2014/main" id="{EF0692E1-7D85-78AD-9CB9-EDC5C0A1CD96}"/>
-                </a:ext>
-              </a:extLst>
-            </p:cNvPr>
-            <p:cNvPicPr>
-              <a:picLocks noChangeAspect="1" noChangeArrowheads="1"/>
-            </p:cNvPicPr>
-            <p:nvPr userDrawn="1"/>
-          </p:nvPicPr>
-          <p:blipFill>
-            <a:blip r:embed="rId6">
-              <a:extLst>
-                <a:ext uri="{28A0092B-C50C-407E-A947-70E740481C1C}">
-                  <a14:useLocalDpi xmlns:a14="http://schemas.microsoft.com/office/drawing/2010/main" val="0"/>
-                </a:ext>
-              </a:extLst>
-            </a:blip>
-            <a:srcRect/>
-            <a:stretch>
-              <a:fillRect/>
-            </a:stretch>
-          </p:blipFill>
-          <p:spPr bwMode="auto">
-            <a:xfrm>
-              <a:off x="341278" y="3628835"/>
-              <a:ext cx="1005840" cy="356329"/>
-            </a:xfrm>
-            <a:prstGeom prst="rect">
-              <a:avLst/>
-            </a:prstGeom>
-            <a:noFill/>
-            <a:extLst>
-              <a:ext uri="{909E8E84-426E-40DD-AFC4-6F175D3DCCD1}">
-                <a14:hiddenFill xmlns:a14="http://schemas.microsoft.com/office/drawing/2010/main">
-                  <a:solidFill>
-                    <a:srgbClr val="FFFFFF"/>
-                  </a:solidFill>
-                </a14:hiddenFill>
-              </a:ext>
-            </a:extLst>
-          </p:spPr>
-        </p:pic>
-        <p:pic>
-          <p:nvPicPr>
-            <p:cNvPr id="7" name="Picture 4">
-              <a:extLst>
-                <a:ext uri="{FF2B5EF4-FFF2-40B4-BE49-F238E27FC236}">
-                  <a16:creationId xmlns:a16="http://schemas.microsoft.com/office/drawing/2014/main" id="{05CDAB3D-B8D6-9AC9-8507-6F95230AEE45}"/>
-                </a:ext>
-              </a:extLst>
-            </p:cNvPr>
-            <p:cNvPicPr>
-              <a:picLocks noChangeAspect="1" noChangeArrowheads="1"/>
-            </p:cNvPicPr>
-            <p:nvPr userDrawn="1"/>
-          </p:nvPicPr>
-          <p:blipFill>
-            <a:blip r:embed="rId7" cstate="print">
-              <a:extLst>
-                <a:ext uri="{28A0092B-C50C-407E-A947-70E740481C1C}">
-                  <a14:useLocalDpi xmlns:a14="http://schemas.microsoft.com/office/drawing/2010/main" val="0"/>
-                </a:ext>
-              </a:extLst>
-            </a:blip>
-            <a:srcRect/>
-            <a:stretch>
-              <a:fillRect/>
-            </a:stretch>
-          </p:blipFill>
-          <p:spPr bwMode="auto">
-            <a:xfrm>
-              <a:off x="1550154" y="3690079"/>
-              <a:ext cx="1005840" cy="233840"/>
-            </a:xfrm>
-            <a:prstGeom prst="rect">
-              <a:avLst/>
-            </a:prstGeom>
-            <a:noFill/>
-            <a:extLst>
-              <a:ext uri="{909E8E84-426E-40DD-AFC4-6F175D3DCCD1}">
-                <a14:hiddenFill xmlns:a14="http://schemas.microsoft.com/office/drawing/2010/main">
-                  <a:solidFill>
-                    <a:srgbClr val="FFFFFF"/>
-                  </a:solidFill>
-                </a14:hiddenFill>
-              </a:ext>
-            </a:extLst>
-          </p:spPr>
-        </p:pic>
-      </p:grpSp>
-      <p:pic>
-        <p:nvPicPr>
-          <p:cNvPr id="11" name="Picture 10" descr="A black and white sign with blue text&#10;&#10;Description automatically generated">
-            <a:extLst>
-              <a:ext uri="{FF2B5EF4-FFF2-40B4-BE49-F238E27FC236}">
-                <a16:creationId xmlns:a16="http://schemas.microsoft.com/office/drawing/2014/main" id="{A50B83FE-88FB-1C61-17CC-A58C0BE092BF}"/>
-              </a:ext>
-            </a:extLst>
-          </p:cNvPr>
-          <p:cNvPicPr>
-            <a:picLocks noChangeAspect="1"/>
-          </p:cNvPicPr>
-          <p:nvPr userDrawn="1"/>
-        </p:nvPicPr>
-        <p:blipFill>
-          <a:blip r:embed="rId8" cstate="print">
-            <a:extLst>
-              <a:ext uri="{28A0092B-C50C-407E-A947-70E740481C1C}">
-                <a14:useLocalDpi xmlns:a14="http://schemas.microsoft.com/office/drawing/2010/main" val="0"/>
-              </a:ext>
-            </a:extLst>
-          </a:blip>
-          <a:stretch>
-            <a:fillRect/>
-          </a:stretch>
-        </p:blipFill>
-        <p:spPr>
-          <a:xfrm>
-            <a:off x="970697" y="4125123"/>
-            <a:ext cx="1005840" cy="324328"/>
-          </a:xfrm>
-          <a:prstGeom prst="rect">
-            <a:avLst/>
-          </a:prstGeom>
-        </p:spPr>
-      </p:pic>
-      <p:sp>
-        <p:nvSpPr>
-          <p:cNvPr id="8" name="TextBox 7">
-            <a:extLst>
-              <a:ext uri="{FF2B5EF4-FFF2-40B4-BE49-F238E27FC236}">
-                <a16:creationId xmlns:a16="http://schemas.microsoft.com/office/drawing/2014/main" id="{DBDB4EA8-7E00-EB97-386F-806F04EDC41A}"/>
+                <a16:creationId xmlns:a16="http://schemas.microsoft.com/office/drawing/2014/main" id="{F0F78BBA-CA78-5294-331D-4FF2C7E24130}"/>
               </a:ext>
             </a:extLst>
           </p:cNvPr>
@@ -2359,7 +2304,7 @@
         </p:nvSpPr>
         <p:spPr>
           <a:xfrm>
-            <a:off x="901538" y="1776974"/>
+            <a:off x="901538" y="1454246"/>
             <a:ext cx="1144159" cy="350865"/>
           </a:xfrm>
           <a:prstGeom prst="rect">
@@ -2387,10 +2332,10 @@
       </p:sp>
       <p:sp>
         <p:nvSpPr>
-          <p:cNvPr id="9" name="TextBox 8">
+          <p:cNvPr id="35" name="TextBox 34">
             <a:extLst>
               <a:ext uri="{FF2B5EF4-FFF2-40B4-BE49-F238E27FC236}">
-                <a16:creationId xmlns:a16="http://schemas.microsoft.com/office/drawing/2014/main" id="{9C6AA8F1-3D17-46A7-8926-BC4892D4C51C}"/>
+                <a16:creationId xmlns:a16="http://schemas.microsoft.com/office/drawing/2014/main" id="{8B46535C-8BAF-4C90-D9FC-1F9DEBD63664}"/>
               </a:ext>
             </a:extLst>
           </p:cNvPr>
@@ -2399,48 +2344,8 @@
         </p:nvSpPr>
         <p:spPr>
           <a:xfrm>
-            <a:off x="28657" y="2079048"/>
-            <a:ext cx="2889921" cy="932563"/>
-          </a:xfrm>
-          <a:prstGeom prst="rect">
-            <a:avLst/>
-          </a:prstGeom>
-          <a:noFill/>
-        </p:spPr>
-        <p:txBody>
-          <a:bodyPr wrap="square" lIns="118872" tIns="91440" rIns="118872" bIns="91440" rtlCol="0" anchor="ctr" anchorCtr="0">
-            <a:spAutoFit/>
-          </a:bodyPr>
-          <a:lstStyle/>
-          <a:p>
-            <a:pPr algn="l">
-              <a:lnSpc>
-                <a:spcPct val="90000"/>
-              </a:lnSpc>
-            </a:pPr>
-            <a:r>
-              <a:rPr lang="en-US" b="1" dirty="0"/>
-              <a:t>COLABS: Collaboration for Better Software for Science</a:t>
-            </a:r>
-          </a:p>
-        </p:txBody>
-      </p:sp>
-      <p:sp>
-        <p:nvSpPr>
-          <p:cNvPr id="10" name="TextBox 9">
-            <a:extLst>
-              <a:ext uri="{FF2B5EF4-FFF2-40B4-BE49-F238E27FC236}">
-                <a16:creationId xmlns:a16="http://schemas.microsoft.com/office/drawing/2014/main" id="{CE38D39D-3F53-1EF5-8F58-4DF913CFD07D}"/>
-              </a:ext>
-            </a:extLst>
-          </p:cNvPr>
-          <p:cNvSpPr txBox="1"/>
-          <p:nvPr userDrawn="1"/>
-        </p:nvSpPr>
-        <p:spPr>
-          <a:xfrm>
-            <a:off x="676315" y="3191133"/>
-            <a:ext cx="1594604" cy="350865"/>
+            <a:off x="948025" y="2646131"/>
+            <a:ext cx="1051185" cy="350865"/>
           </a:xfrm>
           <a:prstGeom prst="rect">
             <a:avLst/>
@@ -2460,17 +2365,17 @@
             </a:pPr>
             <a:r>
               <a:rPr lang="en-US" sz="1200" i="1" dirty="0"/>
-              <a:t>In collaboration with</a:t>
+              <a:t>Members of</a:t>
             </a:r>
           </a:p>
         </p:txBody>
       </p:sp>
       <p:sp>
         <p:nvSpPr>
-          <p:cNvPr id="15" name="TextBox 14">
+          <p:cNvPr id="36" name="TextBox 35">
             <a:extLst>
               <a:ext uri="{FF2B5EF4-FFF2-40B4-BE49-F238E27FC236}">
-                <a16:creationId xmlns:a16="http://schemas.microsoft.com/office/drawing/2014/main" id="{38A567DA-27A0-BFAF-CB9E-0EA56E125664}"/>
+                <a16:creationId xmlns:a16="http://schemas.microsoft.com/office/drawing/2014/main" id="{75AAB72B-84F4-4584-743C-0666B60199DF}"/>
               </a:ext>
             </a:extLst>
           </p:cNvPr>
@@ -2479,7 +2384,7 @@
         </p:nvSpPr>
         <p:spPr>
           <a:xfrm>
-            <a:off x="572120" y="4562849"/>
+            <a:off x="572120" y="4624321"/>
             <a:ext cx="1802994" cy="350865"/>
           </a:xfrm>
           <a:prstGeom prst="rect">
@@ -2507,10 +2412,10 @@
       </p:sp>
       <p:grpSp>
         <p:nvGrpSpPr>
-          <p:cNvPr id="20" name="Group 19">
+          <p:cNvPr id="37" name="Group 36">
             <a:extLst>
               <a:ext uri="{FF2B5EF4-FFF2-40B4-BE49-F238E27FC236}">
-                <a16:creationId xmlns:a16="http://schemas.microsoft.com/office/drawing/2014/main" id="{63A83523-6C92-DDA5-E072-BAC75B3276B6}"/>
+                <a16:creationId xmlns:a16="http://schemas.microsoft.com/office/drawing/2014/main" id="{293E210C-5BED-DDB3-D550-7F26DD4306F1}"/>
               </a:ext>
             </a:extLst>
           </p:cNvPr>
@@ -2527,10 +2432,10 @@
         </p:grpSpPr>
         <p:pic>
           <p:nvPicPr>
-            <p:cNvPr id="17" name="Picture 16">
+            <p:cNvPr id="38" name="Picture 37">
               <a:extLst>
                 <a:ext uri="{FF2B5EF4-FFF2-40B4-BE49-F238E27FC236}">
-                  <a16:creationId xmlns:a16="http://schemas.microsoft.com/office/drawing/2014/main" id="{70EB972A-C812-2D11-E993-9648F06DCD53}"/>
+                  <a16:creationId xmlns:a16="http://schemas.microsoft.com/office/drawing/2014/main" id="{3D9951F4-A286-C918-B7AA-A8464936BF33}"/>
                 </a:ext>
               </a:extLst>
             </p:cNvPr>
@@ -2540,7 +2445,7 @@
             <p:nvPr userDrawn="1"/>
           </p:nvPicPr>
           <p:blipFill>
-            <a:blip r:embed="rId9" cstate="print">
+            <a:blip r:embed="rId6" cstate="print">
               <a:extLst>
                 <a:ext uri="{28A0092B-C50C-407E-A947-70E740481C1C}">
                   <a14:useLocalDpi xmlns:a14="http://schemas.microsoft.com/office/drawing/2010/main" val="0"/>
@@ -2563,10 +2468,10 @@
         </p:pic>
         <p:pic>
           <p:nvPicPr>
-            <p:cNvPr id="18" name="Picture 17" descr="A picture containing shape&#10;&#10;Description automatically generated">
+            <p:cNvPr id="39" name="Picture 38" descr="A picture containing shape&#10;&#10;Description automatically generated">
               <a:extLst>
                 <a:ext uri="{FF2B5EF4-FFF2-40B4-BE49-F238E27FC236}">
-                  <a16:creationId xmlns:a16="http://schemas.microsoft.com/office/drawing/2014/main" id="{DC5CC62A-5FBA-A239-536C-E231ED3105F0}"/>
+                  <a16:creationId xmlns:a16="http://schemas.microsoft.com/office/drawing/2014/main" id="{8C57CFBE-9AF1-2C8C-588A-A688D74DCCF7}"/>
                 </a:ext>
               </a:extLst>
             </p:cNvPr>
@@ -2576,7 +2481,7 @@
             <p:nvPr userDrawn="1"/>
           </p:nvPicPr>
           <p:blipFill>
-            <a:blip r:embed="rId10">
+            <a:blip r:embed="rId7">
               <a:extLst>
                 <a:ext uri="{28A0092B-C50C-407E-A947-70E740481C1C}">
                   <a14:useLocalDpi xmlns:a14="http://schemas.microsoft.com/office/drawing/2010/main" val="0"/>
@@ -2598,6 +2503,293 @@
           </p:spPr>
         </p:pic>
       </p:grpSp>
+      <p:grpSp>
+        <p:nvGrpSpPr>
+          <p:cNvPr id="40" name="Group 39">
+            <a:extLst>
+              <a:ext uri="{FF2B5EF4-FFF2-40B4-BE49-F238E27FC236}">
+                <a16:creationId xmlns:a16="http://schemas.microsoft.com/office/drawing/2014/main" id="{272BA4B7-A005-6A43-8827-E83F4DE01712}"/>
+              </a:ext>
+            </a:extLst>
+          </p:cNvPr>
+          <p:cNvGrpSpPr/>
+          <p:nvPr userDrawn="1"/>
+        </p:nvGrpSpPr>
+        <p:grpSpPr>
+          <a:xfrm>
+            <a:off x="-69503" y="1892144"/>
+            <a:ext cx="2985270" cy="790169"/>
+            <a:chOff x="-69503" y="2214872"/>
+            <a:chExt cx="2985270" cy="790169"/>
+          </a:xfrm>
+        </p:grpSpPr>
+        <p:pic>
+          <p:nvPicPr>
+            <p:cNvPr id="41" name="Picture 4">
+              <a:extLst>
+                <a:ext uri="{FF2B5EF4-FFF2-40B4-BE49-F238E27FC236}">
+                  <a16:creationId xmlns:a16="http://schemas.microsoft.com/office/drawing/2014/main" id="{765E1775-33FC-EACF-C80F-E1D868617F60}"/>
+                </a:ext>
+              </a:extLst>
+            </p:cNvPr>
+            <p:cNvPicPr>
+              <a:picLocks noChangeAspect="1" noChangeArrowheads="1"/>
+            </p:cNvPicPr>
+            <p:nvPr userDrawn="1"/>
+          </p:nvPicPr>
+          <p:blipFill>
+            <a:blip r:embed="rId8" cstate="print">
+              <a:extLst>
+                <a:ext uri="{28A0092B-C50C-407E-A947-70E740481C1C}">
+                  <a14:useLocalDpi xmlns:a14="http://schemas.microsoft.com/office/drawing/2010/main" val="0"/>
+                </a:ext>
+              </a:extLst>
+            </a:blip>
+            <a:srcRect/>
+            <a:stretch>
+              <a:fillRect/>
+            </a:stretch>
+          </p:blipFill>
+          <p:spPr bwMode="auto">
+            <a:xfrm>
+              <a:off x="1484438" y="2317122"/>
+              <a:ext cx="1371600" cy="318873"/>
+            </a:xfrm>
+            <a:prstGeom prst="rect">
+              <a:avLst/>
+            </a:prstGeom>
+            <a:noFill/>
+            <a:extLst>
+              <a:ext uri="{909E8E84-426E-40DD-AFC4-6F175D3DCCD1}">
+                <a14:hiddenFill xmlns:a14="http://schemas.microsoft.com/office/drawing/2010/main">
+                  <a:solidFill>
+                    <a:srgbClr val="FFFFFF"/>
+                  </a:solidFill>
+                </a14:hiddenFill>
+              </a:ext>
+            </a:extLst>
+          </p:spPr>
+        </p:pic>
+        <p:pic>
+          <p:nvPicPr>
+            <p:cNvPr id="42" name="Picture 2" descr="A picture containing graphics, logo, font, symbol&#10;&#10;Description automatically generated">
+              <a:extLst>
+                <a:ext uri="{FF2B5EF4-FFF2-40B4-BE49-F238E27FC236}">
+                  <a16:creationId xmlns:a16="http://schemas.microsoft.com/office/drawing/2014/main" id="{AE24807A-AF21-C96A-5512-2CF0B045B730}"/>
+                </a:ext>
+              </a:extLst>
+            </p:cNvPr>
+            <p:cNvPicPr>
+              <a:picLocks noChangeAspect="1" noChangeArrowheads="1"/>
+            </p:cNvPicPr>
+            <p:nvPr userDrawn="1"/>
+          </p:nvPicPr>
+          <p:blipFill>
+            <a:blip r:embed="rId9" cstate="print">
+              <a:extLst>
+                <a:ext uri="{28A0092B-C50C-407E-A947-70E740481C1C}">
+                  <a14:useLocalDpi xmlns:a14="http://schemas.microsoft.com/office/drawing/2010/main" val="0"/>
+                </a:ext>
+              </a:extLst>
+            </a:blip>
+            <a:srcRect/>
+            <a:stretch>
+              <a:fillRect/>
+            </a:stretch>
+          </p:blipFill>
+          <p:spPr bwMode="auto">
+            <a:xfrm>
+              <a:off x="321595" y="2214872"/>
+              <a:ext cx="841248" cy="523372"/>
+            </a:xfrm>
+            <a:prstGeom prst="rect">
+              <a:avLst/>
+            </a:prstGeom>
+            <a:noFill/>
+            <a:extLst>
+              <a:ext uri="{909E8E84-426E-40DD-AFC4-6F175D3DCCD1}">
+                <a14:hiddenFill xmlns:a14="http://schemas.microsoft.com/office/drawing/2010/main">
+                  <a:solidFill>
+                    <a:srgbClr val="FFFFFF"/>
+                  </a:solidFill>
+                </a14:hiddenFill>
+              </a:ext>
+            </a:extLst>
+          </p:spPr>
+        </p:pic>
+        <p:sp>
+          <p:nvSpPr>
+            <p:cNvPr id="43" name="TextBox 42">
+              <a:extLst>
+                <a:ext uri="{FF2B5EF4-FFF2-40B4-BE49-F238E27FC236}">
+                  <a16:creationId xmlns:a16="http://schemas.microsoft.com/office/drawing/2014/main" id="{0F4DEADF-EC75-D9FE-11CF-E46668DF0429}"/>
+                </a:ext>
+              </a:extLst>
+            </p:cNvPr>
+            <p:cNvSpPr txBox="1"/>
+            <p:nvPr userDrawn="1"/>
+          </p:nvSpPr>
+          <p:spPr>
+            <a:xfrm>
+              <a:off x="-69503" y="2668026"/>
+              <a:ext cx="1631472" cy="337015"/>
+            </a:xfrm>
+            <a:prstGeom prst="rect">
+              <a:avLst/>
+            </a:prstGeom>
+            <a:noFill/>
+          </p:spPr>
+          <p:txBody>
+            <a:bodyPr wrap="none" lIns="118872" tIns="91440" rIns="118872" bIns="91440" rtlCol="0" anchor="ctr" anchorCtr="0">
+              <a:spAutoFit/>
+            </a:bodyPr>
+            <a:lstStyle/>
+            <a:p>
+              <a:pPr algn="l">
+                <a:lnSpc>
+                  <a:spcPct val="90000"/>
+                </a:lnSpc>
+              </a:pPr>
+              <a:r>
+                <a:rPr lang="en-US" sz="1050" i="1" dirty="0">
+                  <a:hlinkClick r:id="rId10"/>
+                </a:rPr>
+                <a:t>https://pesoproject.org</a:t>
+              </a:r>
+              <a:endParaRPr lang="en-US" sz="1050" i="1" dirty="0"/>
+            </a:p>
+          </p:txBody>
+        </p:sp>
+        <p:sp>
+          <p:nvSpPr>
+            <p:cNvPr id="44" name="TextBox 43">
+              <a:extLst>
+                <a:ext uri="{FF2B5EF4-FFF2-40B4-BE49-F238E27FC236}">
+                  <a16:creationId xmlns:a16="http://schemas.microsoft.com/office/drawing/2014/main" id="{3BB76E15-F2F1-A666-3260-82A999CB0E86}"/>
+                </a:ext>
+              </a:extLst>
+            </p:cNvPr>
+            <p:cNvSpPr txBox="1"/>
+            <p:nvPr userDrawn="1"/>
+          </p:nvSpPr>
+          <p:spPr>
+            <a:xfrm>
+              <a:off x="1423755" y="2668026"/>
+              <a:ext cx="1492012" cy="337015"/>
+            </a:xfrm>
+            <a:prstGeom prst="rect">
+              <a:avLst/>
+            </a:prstGeom>
+            <a:noFill/>
+          </p:spPr>
+          <p:txBody>
+            <a:bodyPr wrap="none" lIns="118872" tIns="91440" rIns="118872" bIns="91440" rtlCol="0" anchor="ctr" anchorCtr="0">
+              <a:spAutoFit/>
+            </a:bodyPr>
+            <a:lstStyle/>
+            <a:p>
+              <a:pPr algn="l">
+                <a:lnSpc>
+                  <a:spcPct val="90000"/>
+                </a:lnSpc>
+              </a:pPr>
+              <a:r>
+                <a:rPr lang="en-US" sz="1050" i="1" dirty="0">
+                  <a:hlinkClick r:id="rId11"/>
+                </a:rPr>
+                <a:t>https://rapids.lbl.gov</a:t>
+              </a:r>
+              <a:endParaRPr lang="en-US" sz="1050" i="1" dirty="0"/>
+            </a:p>
+          </p:txBody>
+        </p:sp>
+      </p:grpSp>
+      <p:sp>
+        <p:nvSpPr>
+          <p:cNvPr id="45" name="TextBox 44">
+            <a:extLst>
+              <a:ext uri="{FF2B5EF4-FFF2-40B4-BE49-F238E27FC236}">
+                <a16:creationId xmlns:a16="http://schemas.microsoft.com/office/drawing/2014/main" id="{479612D3-10C7-7CE9-6CE5-E9F498A59A79}"/>
+              </a:ext>
+            </a:extLst>
+          </p:cNvPr>
+          <p:cNvSpPr txBox="1"/>
+          <p:nvPr userDrawn="1"/>
+        </p:nvSpPr>
+        <p:spPr>
+          <a:xfrm>
+            <a:off x="166031" y="4011401"/>
+            <a:ext cx="2605511" cy="655564"/>
+          </a:xfrm>
+          <a:prstGeom prst="rect">
+            <a:avLst/>
+          </a:prstGeom>
+          <a:noFill/>
+        </p:spPr>
+        <p:txBody>
+          <a:bodyPr wrap="square" lIns="118872" tIns="91440" rIns="118872" bIns="91440" rtlCol="0" anchor="ctr" anchorCtr="0">
+            <a:spAutoFit/>
+          </a:bodyPr>
+          <a:lstStyle/>
+          <a:p>
+            <a:pPr algn="ctr">
+              <a:lnSpc>
+                <a:spcPct val="90000"/>
+              </a:lnSpc>
+            </a:pPr>
+            <a:r>
+              <a:rPr lang="en-US" sz="1200" i="1" dirty="0"/>
+              <a:t>Consortium for the Advancement of Scientific Software</a:t>
+            </a:r>
+            <a:br>
+              <a:rPr lang="en-US" sz="1200" i="1" dirty="0"/>
+            </a:br>
+            <a:r>
+              <a:rPr lang="en-US" sz="1000" i="1" dirty="0">
+                <a:hlinkClick r:id="rId12"/>
+              </a:rPr>
+              <a:t>https://cass.community</a:t>
+            </a:r>
+            <a:endParaRPr lang="en-US" sz="1200" i="1" dirty="0"/>
+          </a:p>
+        </p:txBody>
+      </p:sp>
+      <p:pic>
+        <p:nvPicPr>
+          <p:cNvPr id="46" name="Picture 45" descr="A picture containing arrow&#10;&#10;AI-generated content may be incorrect.">
+            <a:extLst>
+              <a:ext uri="{FF2B5EF4-FFF2-40B4-BE49-F238E27FC236}">
+                <a16:creationId xmlns:a16="http://schemas.microsoft.com/office/drawing/2014/main" id="{B4AA5A9E-875B-2389-D2F6-38167E35B66F}"/>
+              </a:ext>
+            </a:extLst>
+          </p:cNvPr>
+          <p:cNvPicPr>
+            <a:picLocks noChangeAspect="1"/>
+          </p:cNvPicPr>
+          <p:nvPr userDrawn="1"/>
+        </p:nvPicPr>
+        <p:blipFill>
+          <a:blip r:embed="rId13" cstate="print">
+            <a:extLst>
+              <a:ext uri="{28A0092B-C50C-407E-A947-70E740481C1C}">
+                <a14:useLocalDpi xmlns:a14="http://schemas.microsoft.com/office/drawing/2010/main" val="0"/>
+              </a:ext>
+            </a:extLst>
+          </a:blip>
+          <a:stretch>
+            <a:fillRect/>
+          </a:stretch>
+        </p:blipFill>
+        <p:spPr>
+          <a:xfrm>
+            <a:off x="849769" y="2974535"/>
+            <a:ext cx="1238034" cy="1128739"/>
+          </a:xfrm>
+          <a:prstGeom prst="rect">
+            <a:avLst/>
+          </a:prstGeom>
+        </p:spPr>
+      </p:pic>
     </p:spTree>
     <p:extLst>
       <p:ext uri="{BB962C8B-B14F-4D97-AF65-F5344CB8AC3E}">
@@ -4058,64 +4250,6 @@
 </p:sldLayout>
 </file>
 
-<file path=ppt/slideLayouts/slideLayout7.xml><?xml version="1.0" encoding="utf-8"?>
-<p:sldLayout xmlns:a="http://schemas.openxmlformats.org/drawingml/2006/main" xmlns:r="http://schemas.openxmlformats.org/officeDocument/2006/relationships" xmlns:p="http://schemas.openxmlformats.org/presentationml/2006/main" type="titleOnly" preserve="1">
-  <p:cSld name="Title Only">
-    <p:spTree>
-      <p:nvGrpSpPr>
-        <p:cNvPr id="1" name=""/>
-        <p:cNvGrpSpPr/>
-        <p:nvPr/>
-      </p:nvGrpSpPr>
-      <p:grpSpPr>
-        <a:xfrm>
-          <a:off x="0" y="0"/>
-          <a:ext cx="0" cy="0"/>
-          <a:chOff x="0" y="0"/>
-          <a:chExt cx="0" cy="0"/>
-        </a:xfrm>
-      </p:grpSpPr>
-      <p:sp>
-        <p:nvSpPr>
-          <p:cNvPr id="2" name="Title 1"/>
-          <p:cNvSpPr>
-            <a:spLocks noGrp="1"/>
-          </p:cNvSpPr>
-          <p:nvPr>
-            <p:ph type="title"/>
-          </p:nvPr>
-        </p:nvSpPr>
-        <p:spPr>
-          <a:xfrm>
-            <a:off x="365760" y="411480"/>
-            <a:ext cx="11375136" cy="914400"/>
-          </a:xfrm>
-        </p:spPr>
-        <p:txBody>
-          <a:bodyPr/>
-          <a:lstStyle/>
-          <a:p>
-            <a:r>
-              <a:rPr lang="en-US"/>
-              <a:t>Click to edit Master title style</a:t>
-            </a:r>
-            <a:endParaRPr lang="en-US" dirty="0"/>
-          </a:p>
-        </p:txBody>
-      </p:sp>
-    </p:spTree>
-    <p:extLst>
-      <p:ext uri="{BB962C8B-B14F-4D97-AF65-F5344CB8AC3E}">
-        <p14:creationId xmlns:p14="http://schemas.microsoft.com/office/powerpoint/2010/main" val="2198867773"/>
-      </p:ext>
-    </p:extLst>
-  </p:cSld>
-  <p:clrMapOvr>
-    <a:masterClrMapping/>
-  </p:clrMapOvr>
-</p:sldLayout>
-</file>
-
 <file path=ppt/slideMasters/slideMaster1.xml><?xml version="1.0" encoding="utf-8"?>
 <p:sldMaster xmlns:a="http://schemas.openxmlformats.org/drawingml/2006/main" xmlns:r="http://schemas.openxmlformats.org/officeDocument/2006/relationships" xmlns:p="http://schemas.openxmlformats.org/presentationml/2006/main" preserve="1">
   <p:cSld>
@@ -4257,36 +4391,6 @@
           </a:p>
         </p:txBody>
       </p:sp>
-      <p:pic>
-        <p:nvPicPr>
-          <p:cNvPr id="13" name="Picture 12"/>
-          <p:cNvPicPr>
-            <a:picLocks noChangeAspect="1"/>
-          </p:cNvPicPr>
-          <p:nvPr userDrawn="1"/>
-        </p:nvPicPr>
-        <p:blipFill>
-          <a:blip r:embed="rId9" cstate="print">
-            <a:extLst>
-              <a:ext uri="{28A0092B-C50C-407E-A947-70E740481C1C}">
-                <a14:useLocalDpi xmlns:a14="http://schemas.microsoft.com/office/drawing/2010/main" val="0"/>
-              </a:ext>
-            </a:extLst>
-          </a:blip>
-          <a:stretch>
-            <a:fillRect/>
-          </a:stretch>
-        </p:blipFill>
-        <p:spPr>
-          <a:xfrm>
-            <a:off x="9741160" y="6185919"/>
-            <a:ext cx="1971212" cy="533060"/>
-          </a:xfrm>
-          <a:prstGeom prst="rect">
-            <a:avLst/>
-          </a:prstGeom>
-        </p:spPr>
-      </p:pic>
       <p:sp>
         <p:nvSpPr>
           <p:cNvPr id="8" name="Rectangle 256"/>
@@ -4390,42 +4494,6 @@
           </a:p>
         </p:txBody>
       </p:sp>
-      <p:pic>
-        <p:nvPicPr>
-          <p:cNvPr id="3" name="Picture 2" descr="A picture containing shape&#10;&#10;Description automatically generated">
-            <a:extLst>
-              <a:ext uri="{FF2B5EF4-FFF2-40B4-BE49-F238E27FC236}">
-                <a16:creationId xmlns:a16="http://schemas.microsoft.com/office/drawing/2014/main" id="{2A4943B8-0F89-4A94-B130-A128F45E57C4}"/>
-              </a:ext>
-            </a:extLst>
-          </p:cNvPr>
-          <p:cNvPicPr>
-            <a:picLocks noChangeAspect="1"/>
-          </p:cNvPicPr>
-          <p:nvPr userDrawn="1"/>
-        </p:nvPicPr>
-        <p:blipFill>
-          <a:blip r:embed="rId10">
-            <a:extLst>
-              <a:ext uri="{28A0092B-C50C-407E-A947-70E740481C1C}">
-                <a14:useLocalDpi xmlns:a14="http://schemas.microsoft.com/office/drawing/2010/main" val="0"/>
-              </a:ext>
-            </a:extLst>
-          </a:blip>
-          <a:stretch>
-            <a:fillRect/>
-          </a:stretch>
-        </p:blipFill>
-        <p:spPr>
-          <a:xfrm>
-            <a:off x="7806050" y="6114121"/>
-            <a:ext cx="1560289" cy="676656"/>
-          </a:xfrm>
-          <a:prstGeom prst="rect">
-            <a:avLst/>
-          </a:prstGeom>
-        </p:spPr>
-      </p:pic>
     </p:spTree>
     <p:extLst>
       <p:ext uri="{BB962C8B-B14F-4D97-AF65-F5344CB8AC3E}">
@@ -4441,7 +4509,6 @@
     <p:sldLayoutId id="2147483939" r:id="rId4"/>
     <p:sldLayoutId id="2147483950" r:id="rId5"/>
     <p:sldLayoutId id="2147483940" r:id="rId6"/>
-    <p:sldLayoutId id="2147483941" r:id="rId7"/>
   </p:sldLayoutIdLst>
   <p:hf hdr="0" ftr="0" dt="0"/>
   <p:txStyles>
@@ -6050,18 +6117,18 @@
 </file>
 
 <file path=customXml/item2.xml><?xml version="1.0" encoding="utf-8"?>
-<p:properties xmlns:p="http://schemas.microsoft.com/office/2006/metadata/properties" xmlns:xsi="http://www.w3.org/2001/XMLSchema-instance" xmlns:pc="http://schemas.microsoft.com/office/infopath/2007/PartnerControls">
-  <documentManagement/>
-</p:properties>
-</file>
-
-<file path=customXml/item3.xml><?xml version="1.0" encoding="utf-8"?>
 <?mso-contentType ?>
 <FormTemplates xmlns="http://schemas.microsoft.com/sharepoint/v3/contenttype/forms">
   <Display>DocumentLibraryForm</Display>
   <Edit>DocumentLibraryForm</Edit>
   <New>DocumentLibraryForm</New>
 </FormTemplates>
+</file>
+
+<file path=customXml/item3.xml><?xml version="1.0" encoding="utf-8"?>
+<p:properties xmlns:p="http://schemas.microsoft.com/office/2006/metadata/properties" xmlns:xsi="http://www.w3.org/2001/XMLSchema-instance" xmlns:pc="http://schemas.microsoft.com/office/infopath/2007/PartnerControls">
+  <documentManagement/>
+</p:properties>
 </file>
 
 <file path=customXml/itemProps1.xml><?xml version="1.0" encoding="utf-8"?>
@@ -6080,6 +6147,14 @@
 </file>
 
 <file path=customXml/itemProps2.xml><?xml version="1.0" encoding="utf-8"?>
+<ds:datastoreItem xmlns:ds="http://schemas.openxmlformats.org/officeDocument/2006/customXml" ds:itemID="{19E20559-B232-4371-8690-E3D8007EDB82}">
+  <ds:schemaRefs>
+    <ds:schemaRef ds:uri="http://schemas.microsoft.com/sharepoint/v3/contenttype/forms"/>
+  </ds:schemaRefs>
+</ds:datastoreItem>
+</file>
+
+<file path=customXml/itemProps3.xml><?xml version="1.0" encoding="utf-8"?>
 <ds:datastoreItem xmlns:ds="http://schemas.openxmlformats.org/officeDocument/2006/customXml" ds:itemID="{A50EC660-24D0-43A0-AE5E-E274115E726B}">
   <ds:schemaRefs>
     <ds:schemaRef ds:uri="http://purl.org/dc/elements/1.1/"/>
@@ -6092,12 +6167,4 @@
     <ds:schemaRef ds:uri="http://schemas.microsoft.com/office/infopath/2007/PartnerControls"/>
   </ds:schemaRefs>
 </ds:datastoreItem>
-</file>
-
-<file path=customXml/itemProps3.xml><?xml version="1.0" encoding="utf-8"?>
-<ds:datastoreItem xmlns:ds="http://schemas.openxmlformats.org/officeDocument/2006/customXml" ds:itemID="{19E20559-B232-4371-8690-E3D8007EDB82}">
-  <ds:schemaRefs>
-    <ds:schemaRef ds:uri="http://schemas.microsoft.com/sharepoint/v3/contenttype/forms"/>
-  </ds:schemaRefs>
-</ds:datastoreItem>
 </file>